--- a/Tis so sweet to trust in Jesus.pptx
+++ b/Tis so sweet to trust in Jesus.pptx
@@ -249,7 +249,7 @@
           <a:p>
             <a:fld id="{E759A0DE-F190-5444-87AC-4719D5F20D15}" type="datetimeFigureOut">
               <a:rPr lang="en-US" smtClean="0"/>
-              <a:t>7/11/26</a:t>
+              <a:t>7/14/26</a:t>
             </a:fld>
             <a:endParaRPr lang="en-US"/>
           </a:p>
@@ -419,7 +419,7 @@
           <a:p>
             <a:fld id="{E759A0DE-F190-5444-87AC-4719D5F20D15}" type="datetimeFigureOut">
               <a:rPr lang="en-US" smtClean="0"/>
-              <a:t>7/11/26</a:t>
+              <a:t>7/14/26</a:t>
             </a:fld>
             <a:endParaRPr lang="en-US"/>
           </a:p>
@@ -599,7 +599,7 @@
           <a:p>
             <a:fld id="{E759A0DE-F190-5444-87AC-4719D5F20D15}" type="datetimeFigureOut">
               <a:rPr lang="en-US" smtClean="0"/>
-              <a:t>7/11/26</a:t>
+              <a:t>7/14/26</a:t>
             </a:fld>
             <a:endParaRPr lang="en-US"/>
           </a:p>
@@ -769,7 +769,7 @@
           <a:p>
             <a:fld id="{E759A0DE-F190-5444-87AC-4719D5F20D15}" type="datetimeFigureOut">
               <a:rPr lang="en-US" smtClean="0"/>
-              <a:t>7/11/26</a:t>
+              <a:t>7/14/26</a:t>
             </a:fld>
             <a:endParaRPr lang="en-US"/>
           </a:p>
@@ -1015,7 +1015,7 @@
           <a:p>
             <a:fld id="{E759A0DE-F190-5444-87AC-4719D5F20D15}" type="datetimeFigureOut">
               <a:rPr lang="en-US" smtClean="0"/>
-              <a:t>7/11/26</a:t>
+              <a:t>7/14/26</a:t>
             </a:fld>
             <a:endParaRPr lang="en-US"/>
           </a:p>
@@ -1247,7 +1247,7 @@
           <a:p>
             <a:fld id="{E759A0DE-F190-5444-87AC-4719D5F20D15}" type="datetimeFigureOut">
               <a:rPr lang="en-US" smtClean="0"/>
-              <a:t>7/11/26</a:t>
+              <a:t>7/14/26</a:t>
             </a:fld>
             <a:endParaRPr lang="en-US"/>
           </a:p>
@@ -1614,7 +1614,7 @@
           <a:p>
             <a:fld id="{E759A0DE-F190-5444-87AC-4719D5F20D15}" type="datetimeFigureOut">
               <a:rPr lang="en-US" smtClean="0"/>
-              <a:t>7/11/26</a:t>
+              <a:t>7/14/26</a:t>
             </a:fld>
             <a:endParaRPr lang="en-US"/>
           </a:p>
@@ -1732,7 +1732,7 @@
           <a:p>
             <a:fld id="{E759A0DE-F190-5444-87AC-4719D5F20D15}" type="datetimeFigureOut">
               <a:rPr lang="en-US" smtClean="0"/>
-              <a:t>7/11/26</a:t>
+              <a:t>7/14/26</a:t>
             </a:fld>
             <a:endParaRPr lang="en-US"/>
           </a:p>
@@ -1827,7 +1827,7 @@
           <a:p>
             <a:fld id="{E759A0DE-F190-5444-87AC-4719D5F20D15}" type="datetimeFigureOut">
               <a:rPr lang="en-US" smtClean="0"/>
-              <a:t>7/11/26</a:t>
+              <a:t>7/14/26</a:t>
             </a:fld>
             <a:endParaRPr lang="en-US"/>
           </a:p>
@@ -2104,7 +2104,7 @@
           <a:p>
             <a:fld id="{E759A0DE-F190-5444-87AC-4719D5F20D15}" type="datetimeFigureOut">
               <a:rPr lang="en-US" smtClean="0"/>
-              <a:t>7/11/26</a:t>
+              <a:t>7/14/26</a:t>
             </a:fld>
             <a:endParaRPr lang="en-US"/>
           </a:p>
@@ -2361,7 +2361,7 @@
           <a:p>
             <a:fld id="{E759A0DE-F190-5444-87AC-4719D5F20D15}" type="datetimeFigureOut">
               <a:rPr lang="en-US" smtClean="0"/>
-              <a:t>7/11/26</a:t>
+              <a:t>7/14/26</a:t>
             </a:fld>
             <a:endParaRPr lang="en-US"/>
           </a:p>
@@ -2574,7 +2574,7 @@
           <a:p>
             <a:fld id="{E759A0DE-F190-5444-87AC-4719D5F20D15}" type="datetimeFigureOut">
               <a:rPr lang="en-US" smtClean="0"/>
-              <a:t>7/11/26</a:t>
+              <a:t>7/14/26</a:t>
             </a:fld>
             <a:endParaRPr lang="en-US"/>
           </a:p>
@@ -3023,14 +3023,137 @@
           <a:p>
             <a:pPr algn="l"/>
             <a:r>
-              <a:rPr lang="en-US" sz="6600" dirty="0">
+              <a:rPr lang="en-US" sz="6600">
                 <a:solidFill>
                   <a:schemeClr val="bg1"/>
                 </a:solidFill>
                 <a:latin typeface="Avenir Medium" panose="02000503020000020003" pitchFamily="2" charset="0"/>
                 <a:ea typeface="Bodoni Ornaments" pitchFamily="2" charset="0"/>
               </a:rPr>
-              <a:t>Tis so sweet to trust in Jesus</a:t>
+              <a:t>‘Tis </a:t>
+            </a:r>
+            <a:r>
+              <a:rPr lang="en-US" sz="6600" dirty="0">
+                <a:solidFill>
+                  <a:schemeClr val="bg1"/>
+                </a:solidFill>
+                <a:latin typeface="Avenir Medium" panose="02000503020000020003" pitchFamily="2" charset="0"/>
+                <a:ea typeface="Bodoni Ornaments" pitchFamily="2" charset="0"/>
+              </a:rPr>
+              <a:t>So Sweet </a:t>
+            </a:r>
+            <a:r>
+              <a:rPr lang="en-US" sz="6600">
+                <a:solidFill>
+                  <a:schemeClr val="bg1"/>
+                </a:solidFill>
+                <a:latin typeface="Avenir Medium" panose="02000503020000020003" pitchFamily="2" charset="0"/>
+                <a:ea typeface="Bodoni Ornaments" pitchFamily="2" charset="0"/>
+              </a:rPr>
+              <a:t>To </a:t>
+            </a:r>
+            <a:r>
+              <a:rPr lang="en-US" sz="6600" dirty="0">
+                <a:solidFill>
+                  <a:schemeClr val="bg1"/>
+                </a:solidFill>
+                <a:latin typeface="Avenir Medium" panose="02000503020000020003" pitchFamily="2" charset="0"/>
+                <a:ea typeface="Bodoni Ornaments" pitchFamily="2" charset="0"/>
+              </a:rPr>
+              <a:t>T</a:t>
+            </a:r>
+            <a:r>
+              <a:rPr lang="en-US" sz="6600">
+                <a:solidFill>
+                  <a:schemeClr val="bg1"/>
+                </a:solidFill>
+                <a:latin typeface="Avenir Medium" panose="02000503020000020003" pitchFamily="2" charset="0"/>
+                <a:ea typeface="Bodoni Ornaments" pitchFamily="2" charset="0"/>
+              </a:rPr>
+              <a:t>rust </a:t>
+            </a:r>
+            <a:r>
+              <a:rPr lang="en-US" sz="6600" dirty="0">
+                <a:solidFill>
+                  <a:schemeClr val="bg1"/>
+                </a:solidFill>
+                <a:latin typeface="Avenir Medium" panose="02000503020000020003" pitchFamily="2" charset="0"/>
+                <a:ea typeface="Bodoni Ornaments" pitchFamily="2" charset="0"/>
+              </a:rPr>
+              <a:t>in Jesus</a:t>
+            </a:r>
+          </a:p>
+        </p:txBody>
+      </p:sp>
+      <p:sp>
+        <p:nvSpPr>
+          <p:cNvPr id="2" name="TextBox 1">
+            <a:extLst>
+              <a:ext uri="{FF2B5EF4-FFF2-40B4-BE49-F238E27FC236}">
+                <a16:creationId xmlns:a16="http://schemas.microsoft.com/office/drawing/2014/main" id="{B877D249-FDD7-AFE6-AFC7-753B44B95B7A}"/>
+              </a:ext>
+            </a:extLst>
+          </p:cNvPr>
+          <p:cNvSpPr txBox="1"/>
+          <p:nvPr/>
+        </p:nvSpPr>
+        <p:spPr>
+          <a:xfrm>
+            <a:off x="168442" y="5444311"/>
+            <a:ext cx="8807115" cy="1200329"/>
+          </a:xfrm>
+          <a:prstGeom prst="rect">
+            <a:avLst/>
+          </a:prstGeom>
+          <a:noFill/>
+        </p:spPr>
+        <p:txBody>
+          <a:bodyPr wrap="square" rtlCol="0">
+            <a:spAutoFit/>
+          </a:bodyPr>
+          <a:lstStyle/>
+          <a:p>
+            <a:pPr algn="ctr"/>
+            <a:r>
+              <a:rPr lang="en-US" dirty="0">
+                <a:solidFill>
+                  <a:schemeClr val="bg1"/>
+                </a:solidFill>
+              </a:rPr>
+              <a:t>Words by Louisa M.R. Stead (1882)</a:t>
+            </a:r>
+          </a:p>
+          <a:p>
+            <a:pPr algn="ctr"/>
+            <a:r>
+              <a:rPr lang="en-US" dirty="0">
+                <a:solidFill>
+                  <a:schemeClr val="bg1"/>
+                </a:solidFill>
+              </a:rPr>
+              <a:t>Music by William J. Kirkpatrick (1882)</a:t>
+            </a:r>
+          </a:p>
+          <a:p>
+            <a:pPr algn="ctr"/>
+            <a:r>
+              <a:rPr lang="en-US" dirty="0">
+                <a:solidFill>
+                  <a:schemeClr val="bg1"/>
+                </a:solidFill>
+              </a:rPr>
+              <a:t>Public Domain</a:t>
+            </a:r>
+          </a:p>
+          <a:p>
+            <a:pPr algn="ctr"/>
+            <a:r>
+              <a:rPr lang="en-US" dirty="0">
+                <a:solidFill>
+                  <a:schemeClr val="bg1"/>
+                </a:solidFill>
+              </a:rPr>
+              <a:t>CCLI License #137776</a:t>
             </a:r>
           </a:p>
         </p:txBody>
